--- a/WorldCup2026_EDA.pptx
+++ b/WorldCup2026_EDA.pptx
@@ -5,7 +5,7 @@
     <p:sldMasterId id="2147483648" r:id="rId1"/>
   </p:sldMasterIdLst>
   <p:notesMasterIdLst>
-    <p:notesMasterId r:id="rId15"/>
+    <p:notesMasterId r:id="rId14"/>
   </p:notesMasterIdLst>
   <p:sldIdLst>
     <p:sldId id="256" r:id="rId2"/>
@@ -20,7 +20,6 @@
     <p:sldId id="265" r:id="rId11"/>
     <p:sldId id="266" r:id="rId12"/>
     <p:sldId id="267" r:id="rId13"/>
-    <p:sldId id="268" r:id="rId14"/>
   </p:sldIdLst>
   <p:sldSz cx="9144000" cy="5143500" type="screen16x9"/>
   <p:notesSz cx="5143500" cy="9144000"/>
@@ -585,90 +584,6 @@
 </p:notes>
 </file>
 
-<file path=ppt/notesSlides/notesSlide13.xml><?xml version="1.0" encoding="utf-8"?>
-<p:notes xmlns:a="http://schemas.openxmlformats.org/drawingml/2006/main" xmlns:r="http://schemas.openxmlformats.org/officeDocument/2006/relationships" xmlns:p="http://schemas.openxmlformats.org/presentationml/2006/main">
-  <p:cSld>
-    <p:spTree>
-      <p:nvGrpSpPr>
-        <p:cNvPr id="1" name=""/>
-        <p:cNvGrpSpPr/>
-        <p:nvPr/>
-      </p:nvGrpSpPr>
-      <p:grpSpPr>
-        <a:xfrm>
-          <a:off x="0" y="0"/>
-          <a:ext cx="0" cy="0"/>
-          <a:chOff x="0" y="0"/>
-          <a:chExt cx="0" cy="0"/>
-        </a:xfrm>
-      </p:grpSpPr>
-      <p:sp>
-        <p:nvSpPr>
-          <p:cNvPr id="2" name="Slide Image Placeholder 1"/>
-          <p:cNvSpPr>
-            <a:spLocks noGrp="1" noRot="1" noChangeAspect="1"/>
-          </p:cNvSpPr>
-          <p:nvPr>
-            <p:ph type="sldImg"/>
-          </p:nvPr>
-        </p:nvSpPr>
-        <p:spPr/>
-      </p:sp>
-      <p:sp>
-        <p:nvSpPr>
-          <p:cNvPr id="3" name="Notes Placeholder 2"/>
-          <p:cNvSpPr>
-            <a:spLocks noGrp="1"/>
-          </p:cNvSpPr>
-          <p:nvPr>
-            <p:ph type="body" idx="1"/>
-          </p:nvPr>
-        </p:nvSpPr>
-        <p:spPr/>
-        <p:txBody>
-          <a:bodyPr/>
-          <a:lstStyle/>
-          <a:p>
-            <a:endParaRPr lang="en-US" dirty="0"/>
-          </a:p>
-        </p:txBody>
-      </p:sp>
-      <p:sp>
-        <p:nvSpPr>
-          <p:cNvPr id="4" name="Slide Number Placeholder 3"/>
-          <p:cNvSpPr>
-            <a:spLocks noGrp="1"/>
-          </p:cNvSpPr>
-          <p:nvPr>
-            <p:ph type="sldNum" sz="quarter" idx="10"/>
-          </p:nvPr>
-        </p:nvSpPr>
-        <p:spPr/>
-        <p:txBody>
-          <a:bodyPr/>
-          <a:lstStyle/>
-          <a:p>
-            <a:fld id="{F7021451-1387-4CA6-816F-3879F97B5CBC}" type="slidenum">
-              <a:rPr lang="en-US"/>
-              <a:t>13</a:t>
-            </a:fld>
-            <a:endParaRPr lang="en-US"/>
-          </a:p>
-        </p:txBody>
-      </p:sp>
-    </p:spTree>
-    <p:extLst>
-      <p:ext uri="{BB962C8B-B14F-4D97-AF65-F5344CB8AC3E}">
-        <p14:creationId xmlns:p14="http://schemas.microsoft.com/office/powerpoint/2010/main" val="1024086991"/>
-      </p:ext>
-    </p:extLst>
-  </p:cSld>
-  <p:clrMapOvr>
-    <a:masterClrMapping/>
-  </p:clrMapOvr>
-</p:notes>
-</file>
-
 <file path=ppt/notesSlides/notesSlide2.xml><?xml version="1.0" encoding="utf-8"?>
 <p:notes xmlns:a="http://schemas.openxmlformats.org/drawingml/2006/main" xmlns:r="http://schemas.openxmlformats.org/officeDocument/2006/relationships" xmlns:p="http://schemas.openxmlformats.org/presentationml/2006/main">
   <p:cSld>
@@ -1809,12 +1724,27 @@
                   <a:srgbClr val="94A3B8"/>
                 </a:solidFill>
                 <a:latin typeface="Calibri" pitchFamily="34" charset="0"/>
-                <a:ea typeface="Calibri" pitchFamily="34" charset="-122"/>
                 <a:cs typeface="Calibri" pitchFamily="34" charset="-120"/>
               </a:rPr>
-              <a:t>A data-driven exploration of 4 key datasets:</a:t>
-            </a:r>
-            <a:endParaRPr lang="en-US" sz="1400" dirty="0"/>
+              <a:t>Adolfo </a:t>
+            </a:r>
+            <a:r>
+              <a:rPr lang="en-US" sz="1400" dirty="0" err="1">
+                <a:solidFill>
+                  <a:srgbClr val="94A3B8"/>
+                </a:solidFill>
+                <a:latin typeface="Calibri" pitchFamily="34" charset="0"/>
+                <a:cs typeface="Calibri" pitchFamily="34" charset="-120"/>
+              </a:rPr>
+              <a:t>Yunes</a:t>
+            </a:r>
+            <a:endParaRPr lang="en-US" sz="1400" dirty="0">
+              <a:solidFill>
+                <a:srgbClr val="94A3B8"/>
+              </a:solidFill>
+              <a:latin typeface="Calibri" pitchFamily="34" charset="0"/>
+              <a:cs typeface="Calibri" pitchFamily="34" charset="-120"/>
+            </a:endParaRPr>
           </a:p>
           <a:p>
             <a:pPr marL="0" indent="0" algn="l">
@@ -1829,10 +1759,9 @@
                   <a:srgbClr val="94A3B8"/>
                 </a:solidFill>
                 <a:latin typeface="Calibri" pitchFamily="34" charset="0"/>
-                <a:ea typeface="Calibri" pitchFamily="34" charset="-122"/>
                 <a:cs typeface="Calibri" pitchFamily="34" charset="-120"/>
               </a:rPr>
-              <a:t>Transfermarkt · Qualifiers · FIFA Ranking · World Cup History</a:t>
+              <a:t>Bernardo del Rio</a:t>
             </a:r>
             <a:endParaRPr lang="en-US" sz="1400" dirty="0"/>
           </a:p>
@@ -3270,263 +3199,6 @@
                 <a:cs typeface="Calibri" pitchFamily="34" charset="-120"/>
               </a:rPr>
               <a:t>Confirmed teams show ~2× higher win rates and better defensive records than playoff teams across all confederations.</a:t>
-            </a:r>
-            <a:endParaRPr lang="en-US" sz="1100" dirty="0"/>
-          </a:p>
-        </p:txBody>
-      </p:sp>
-    </p:spTree>
-  </p:cSld>
-  <p:clrMapOvr>
-    <a:masterClrMapping/>
-  </p:clrMapOvr>
-</p:sld>
-</file>
-
-<file path=ppt/slides/slide13.xml><?xml version="1.0" encoding="utf-8"?>
-<p:sld xmlns:a="http://schemas.openxmlformats.org/drawingml/2006/main" xmlns:r="http://schemas.openxmlformats.org/officeDocument/2006/relationships" xmlns:p="http://schemas.openxmlformats.org/presentationml/2006/main">
-  <p:cSld name="Slide 13">
-    <p:bg>
-      <p:bgPr>
-        <a:solidFill>
-          <a:srgbClr val="0F172A"/>
-        </a:solidFill>
-        <a:effectLst/>
-      </p:bgPr>
-    </p:bg>
-    <p:spTree>
-      <p:nvGrpSpPr>
-        <p:cNvPr id="1" name=""/>
-        <p:cNvGrpSpPr/>
-        <p:nvPr/>
-      </p:nvGrpSpPr>
-      <p:grpSpPr>
-        <a:xfrm>
-          <a:off x="0" y="0"/>
-          <a:ext cx="0" cy="0"/>
-          <a:chOff x="0" y="0"/>
-          <a:chExt cx="0" cy="0"/>
-        </a:xfrm>
-      </p:grpSpPr>
-      <p:sp>
-        <p:nvSpPr>
-          <p:cNvPr id="2" name="Shape 0"/>
-          <p:cNvSpPr/>
-          <p:nvPr/>
-        </p:nvSpPr>
-        <p:spPr>
-          <a:xfrm>
-            <a:off x="0" y="0"/>
-            <a:ext cx="9144000" cy="54864"/>
-          </a:xfrm>
-          <a:prstGeom prst="rect">
-            <a:avLst/>
-          </a:prstGeom>
-          <a:solidFill>
-            <a:srgbClr val="F59E0B"/>
-          </a:solidFill>
-          <a:ln/>
-        </p:spPr>
-      </p:sp>
-      <p:sp>
-        <p:nvSpPr>
-          <p:cNvPr id="3" name="Text 1"/>
-          <p:cNvSpPr/>
-          <p:nvPr/>
-        </p:nvSpPr>
-        <p:spPr>
-          <a:xfrm>
-            <a:off x="731520" y="914400"/>
-            <a:ext cx="7680960" cy="640080"/>
-          </a:xfrm>
-          <a:prstGeom prst="rect">
-            <a:avLst/>
-          </a:prstGeom>
-          <a:noFill/>
-          <a:ln/>
-        </p:spPr>
-        <p:txBody>
-          <a:bodyPr wrap="square" rtlCol="0" anchor="ctr"/>
-          <a:lstStyle/>
-          <a:p>
-            <a:pPr marL="0" indent="0" algn="l">
-              <a:buNone/>
-            </a:pPr>
-            <a:r>
-              <a:rPr lang="en-US" sz="3200" b="1" dirty="0">
-                <a:solidFill>
-                  <a:srgbClr val="F59E0B"/>
-                </a:solidFill>
-                <a:latin typeface="Georgia" pitchFamily="34" charset="0"/>
-                <a:ea typeface="Georgia" pitchFamily="34" charset="-122"/>
-                <a:cs typeface="Georgia" pitchFamily="34" charset="-120"/>
-              </a:rPr>
-              <a:t>NEXT STEPS</a:t>
-            </a:r>
-            <a:endParaRPr lang="en-US" sz="3200" dirty="0"/>
-          </a:p>
-        </p:txBody>
-      </p:sp>
-      <p:sp>
-        <p:nvSpPr>
-          <p:cNvPr id="4" name="Text 2"/>
-          <p:cNvSpPr/>
-          <p:nvPr/>
-        </p:nvSpPr>
-        <p:spPr>
-          <a:xfrm>
-            <a:off x="731520" y="1828800"/>
-            <a:ext cx="7680960" cy="2286000"/>
-          </a:xfrm>
-          <a:prstGeom prst="rect">
-            <a:avLst/>
-          </a:prstGeom>
-          <a:noFill/>
-          <a:ln/>
-        </p:spPr>
-        <p:txBody>
-          <a:bodyPr wrap="square" rtlCol="0" anchor="t"/>
-          <a:lstStyle/>
-          <a:p>
-            <a:pPr marL="342900" indent="-342900">
-              <a:spcAft>
-                <a:spcPts val="1200"/>
-              </a:spcAft>
-              <a:buSzPct val="100000"/>
-              <a:buChar char="•"/>
-            </a:pPr>
-            <a:r>
-              <a:rPr lang="en-US" sz="1300" dirty="0">
-                <a:solidFill>
-                  <a:srgbClr val="F1F5F9"/>
-                </a:solidFill>
-                <a:latin typeface="Calibri" pitchFamily="34" charset="0"/>
-                <a:ea typeface="Calibri" pitchFamily="34" charset="-122"/>
-                <a:cs typeface="Calibri" pitchFamily="34" charset="-120"/>
-              </a:rPr>
-              <a:t>Feature Engineering — build the master dataset from these 4 sources</a:t>
-            </a:r>
-            <a:endParaRPr lang="en-US" sz="1300" dirty="0"/>
-          </a:p>
-          <a:p>
-            <a:pPr marL="342900" indent="-342900">
-              <a:spcAft>
-                <a:spcPts val="1200"/>
-              </a:spcAft>
-              <a:buSzPct val="100000"/>
-              <a:buChar char="•"/>
-            </a:pPr>
-            <a:r>
-              <a:rPr lang="en-US" sz="1300" dirty="0">
-                <a:solidFill>
-                  <a:srgbClr val="F1F5F9"/>
-                </a:solidFill>
-                <a:latin typeface="Calibri" pitchFamily="34" charset="0"/>
-                <a:ea typeface="Calibri" pitchFamily="34" charset="-122"/>
-                <a:cs typeface="Calibri" pitchFamily="34" charset="-120"/>
-              </a:rPr>
-              <a:t>Model Training — classification model for match outcomes (W/D/L)</a:t>
-            </a:r>
-            <a:endParaRPr lang="en-US" sz="1300" dirty="0"/>
-          </a:p>
-          <a:p>
-            <a:pPr marL="342900" indent="-342900">
-              <a:spcAft>
-                <a:spcPts val="1200"/>
-              </a:spcAft>
-              <a:buSzPct val="100000"/>
-              <a:buChar char="•"/>
-            </a:pPr>
-            <a:r>
-              <a:rPr lang="en-US" sz="1300" dirty="0">
-                <a:solidFill>
-                  <a:srgbClr val="F1F5F9"/>
-                </a:solidFill>
-                <a:latin typeface="Calibri" pitchFamily="34" charset="0"/>
-                <a:ea typeface="Calibri" pitchFamily="34" charset="-122"/>
-                <a:cs typeface="Calibri" pitchFamily="34" charset="-120"/>
-              </a:rPr>
-              <a:t>Monte Carlo Simulation — simulate the full tournament thousands of times</a:t>
-            </a:r>
-            <a:endParaRPr lang="en-US" sz="1300" dirty="0"/>
-          </a:p>
-          <a:p>
-            <a:pPr marL="342900" indent="-342900">
-              <a:spcAft>
-                <a:spcPts val="1200"/>
-              </a:spcAft>
-              <a:buSzPct val="100000"/>
-              <a:buChar char="•"/>
-            </a:pPr>
-            <a:r>
-              <a:rPr lang="en-US" sz="1300" dirty="0">
-                <a:solidFill>
-                  <a:srgbClr val="F1F5F9"/>
-                </a:solidFill>
-                <a:latin typeface="Calibri" pitchFamily="34" charset="0"/>
-                <a:ea typeface="Calibri" pitchFamily="34" charset="-122"/>
-                <a:cs typeface="Calibri" pitchFamily="34" charset="-120"/>
-              </a:rPr>
-              <a:t>Championship Probability Ranking — probabilistic prediction of the winner</a:t>
-            </a:r>
-            <a:endParaRPr lang="en-US" sz="1300" dirty="0"/>
-          </a:p>
-        </p:txBody>
-      </p:sp>
-      <p:sp>
-        <p:nvSpPr>
-          <p:cNvPr id="5" name="Shape 3"/>
-          <p:cNvSpPr/>
-          <p:nvPr/>
-        </p:nvSpPr>
-        <p:spPr>
-          <a:xfrm>
-            <a:off x="0" y="4754880"/>
-            <a:ext cx="9144000" cy="388620"/>
-          </a:xfrm>
-          <a:prstGeom prst="rect">
-            <a:avLst/>
-          </a:prstGeom>
-          <a:solidFill>
-            <a:srgbClr val="0D9488"/>
-          </a:solidFill>
-          <a:ln/>
-        </p:spPr>
-      </p:sp>
-      <p:sp>
-        <p:nvSpPr>
-          <p:cNvPr id="6" name="Text 4"/>
-          <p:cNvSpPr/>
-          <p:nvPr/>
-        </p:nvSpPr>
-        <p:spPr>
-          <a:xfrm>
-            <a:off x="731520" y="4800600"/>
-            <a:ext cx="7680960" cy="320040"/>
-          </a:xfrm>
-          <a:prstGeom prst="rect">
-            <a:avLst/>
-          </a:prstGeom>
-          <a:noFill/>
-          <a:ln/>
-        </p:spPr>
-        <p:txBody>
-          <a:bodyPr wrap="square" rtlCol="0" anchor="ctr"/>
-          <a:lstStyle/>
-          <a:p>
-            <a:pPr marL="0" indent="0" algn="ctr">
-              <a:buNone/>
-            </a:pPr>
-            <a:r>
-              <a:rPr lang="en-US" sz="1100" dirty="0">
-                <a:solidFill>
-                  <a:srgbClr val="FFFFFF"/>
-                </a:solidFill>
-                <a:latin typeface="Calibri" pitchFamily="34" charset="0"/>
-                <a:ea typeface="Calibri" pitchFamily="34" charset="-122"/>
-                <a:cs typeface="Calibri" pitchFamily="34" charset="-120"/>
-              </a:rPr>
-              <a:t>FIFA World Cup 2026 Prediction Project — EDA Presentation</a:t>
             </a:r>
             <a:endParaRPr lang="en-US" sz="1100" dirty="0"/>
           </a:p>
